--- a/06_Presentation/Zomato_Project_Presentation.pptx
+++ b/06_Presentation/Zomato_Project_Presentation.pptx
@@ -10876,7 +10876,7 @@
                 <a:ea typeface="Consolas" pitchFamily="34" charset="-122"/>
                 <a:cs typeface="Consolas" pitchFamily="34" charset="-120"/>
               </a:rPr>
-              <a:t>04_PowerBI_Guide/</a:t>
+              <a:t>04_PowerBI/</a:t>
             </a:r>
             <a:endParaRPr lang="en-US" sz="1050" dirty="0"/>
           </a:p>
@@ -10915,7 +10915,7 @@
                 <a:ea typeface="Consolas" pitchFamily="34" charset="-122"/>
                 <a:cs typeface="Consolas" pitchFamily="34" charset="-120"/>
               </a:rPr>
-              <a:t>Step-by-step build guide, mapped to all 10 tasks</a:t>
+              <a:t>Zomato_Dashboard.pbix — finished interactive report</a:t>
             </a:r>
             <a:endParaRPr lang="en-US" sz="1050" dirty="0"/>
           </a:p>
@@ -10954,7 +10954,7 @@
                 <a:ea typeface="Consolas" pitchFamily="34" charset="-122"/>
                 <a:cs typeface="Consolas" pitchFamily="34" charset="-120"/>
               </a:rPr>
-              <a:t>05_HTML_Dashboard/</a:t>
+              <a:t>05_Documentation/</a:t>
             </a:r>
             <a:endParaRPr lang="en-US" sz="1050" dirty="0"/>
           </a:p>
@@ -10993,7 +10993,7 @@
                 <a:ea typeface="Consolas" pitchFamily="34" charset="-122"/>
                 <a:cs typeface="Consolas" pitchFamily="34" charset="-120"/>
               </a:rPr>
-              <a:t>index.html — interactive preview, open in any browser</a:t>
+              <a:t>Project_Documentation.md — findings &amp; recommendations</a:t>
             </a:r>
             <a:endParaRPr lang="en-US" sz="1050" dirty="0"/>
           </a:p>
@@ -11032,7 +11032,7 @@
                 <a:ea typeface="Consolas" pitchFamily="34" charset="-122"/>
                 <a:cs typeface="Consolas" pitchFamily="34" charset="-120"/>
               </a:rPr>
-              <a:t>06_Documentation/ &amp; 07_Presentation/</a:t>
+              <a:t>06_Presentation/</a:t>
             </a:r>
             <a:endParaRPr lang="en-US" sz="1050" dirty="0"/>
           </a:p>
@@ -11071,7 +11071,7 @@
                 <a:ea typeface="Consolas" pitchFamily="34" charset="-122"/>
                 <a:cs typeface="Consolas" pitchFamily="34" charset="-120"/>
               </a:rPr>
-              <a:t>Findings, recommendations, and this deck</a:t>
+              <a:t>Zomato_Project_Presentation.pptx — this deck</a:t>
             </a:r>
             <a:endParaRPr lang="en-US" sz="1050" dirty="0"/>
           </a:p>
@@ -11200,7 +11200,7 @@
                 <a:ea typeface="Arial" pitchFamily="34" charset="-122"/>
                 <a:cs typeface="Arial" pitchFamily="34" charset="-120"/>
               </a:rPr>
-              <a:t>MySQL database export</a:t>
+              <a:t>MySQL database scripts</a:t>
             </a:r>
             <a:endParaRPr lang="en-US" sz="1050" dirty="0"/>
           </a:p>
@@ -11263,7 +11263,7 @@
                 <a:ea typeface="Arial" pitchFamily="34" charset="-122"/>
                 <a:cs typeface="Arial" pitchFamily="34" charset="-120"/>
               </a:rPr>
-              <a:t>Power BI build guide (.pbix ready)</a:t>
+              <a:t>Power BI report (finished .pbix)</a:t>
             </a:r>
             <a:endParaRPr lang="en-US" sz="1050" dirty="0"/>
           </a:p>
@@ -11389,7 +11389,7 @@
                 <a:ea typeface="Arial" pitchFamily="34" charset="-122"/>
                 <a:cs typeface="Arial" pitchFamily="34" charset="-120"/>
               </a:rPr>
-              <a:t>Interactive HTML dashboard</a:t>
+              <a:t>Project documentation (Word &amp; Markdown)</a:t>
             </a:r>
             <a:endParaRPr lang="en-US" sz="1050" dirty="0"/>
           </a:p>
@@ -11452,7 +11452,7 @@
                 <a:ea typeface="Arial" pitchFamily="34" charset="-122"/>
                 <a:cs typeface="Arial" pitchFamily="34" charset="-120"/>
               </a:rPr>
-              <a:t>Project documentation</a:t>
+              <a:t>Stakeholder presentation deck</a:t>
             </a:r>
             <a:endParaRPr lang="en-US" sz="1050" dirty="0"/>
           </a:p>
@@ -11515,7 +11515,7 @@
                 <a:ea typeface="Arial" pitchFamily="34" charset="-122"/>
                 <a:cs typeface="Arial" pitchFamily="34" charset="-120"/>
               </a:rPr>
-              <a:t>Stakeholder presentation</a:t>
+              <a:t>README &amp; folder guide</a:t>
             </a:r>
             <a:endParaRPr lang="en-US" sz="1050" dirty="0"/>
           </a:p>
@@ -11686,7 +11686,7 @@
                 <a:ea typeface="Consolas" pitchFamily="34" charset="-122"/>
                 <a:cs typeface="Consolas" pitchFamily="34" charset="-120"/>
               </a:rPr>
-              <a:t>NEXT STEPS</a:t>
+              <a:t>PROJECT STATUS</a:t>
             </a:r>
             <a:endParaRPr lang="en-US" sz="1300" dirty="0"/>
           </a:p>
@@ -11728,7 +11728,7 @@
                 <a:ea typeface="Georgia" pitchFamily="34" charset="-122"/>
                 <a:cs typeface="Georgia" pitchFamily="34" charset="-120"/>
               </a:rPr>
-              <a:t>Build the live Power BI report</a:t>
+              <a:t>The dashboard is built</a:t>
             </a:r>
             <a:endParaRPr lang="en-US" sz="3400" dirty="0"/>
           </a:p>
@@ -11748,7 +11748,7 @@
                 <a:ea typeface="Georgia" pitchFamily="34" charset="-122"/>
                 <a:cs typeface="Georgia" pitchFamily="34" charset="-120"/>
               </a:rPr>
-              <a:t>using the included guide.</a:t>
+              <a:t>and ready to explore.</a:t>
             </a:r>
             <a:endParaRPr lang="en-US" sz="3400" dirty="0"/>
           </a:p>
@@ -11826,7 +11826,7 @@
                 <a:ea typeface="Arial" pitchFamily="34" charset="-122"/>
                 <a:cs typeface="Arial" pitchFamily="34" charset="-120"/>
               </a:rPr>
-              <a:t>Open 03_Transformed_Data/Zomato_Transformed_Data.xlsx in Power BI Desktop</a:t>
+              <a:t>Open 04_PowerBI/Zomato_Dashboard.pbix in Power BI Desktop to explore</a:t>
             </a:r>
             <a:endParaRPr lang="en-US" sz="1400" dirty="0"/>
           </a:p>
@@ -11904,7 +11904,7 @@
                 <a:ea typeface="Arial" pitchFamily="34" charset="-122"/>
                 <a:cs typeface="Arial" pitchFamily="34" charset="-120"/>
               </a:rPr>
-              <a:t>Follow 04_PowerBI_Guide/PowerBI_Build_Guide.md, visual by visual</a:t>
+              <a:t>Filter by city, area, or restaurant using the built-in slicers</a:t>
             </a:r>
             <a:endParaRPr lang="en-US" sz="1400" dirty="0"/>
           </a:p>
@@ -11982,7 +11982,7 @@
                 <a:ea typeface="Arial" pitchFamily="34" charset="-122"/>
                 <a:cs typeface="Arial" pitchFamily="34" charset="-120"/>
               </a:rPr>
-              <a:t>Publish the .pbix back into 07_Presentation/ alongside this deck</a:t>
+              <a:t>See full findings in 05_Documentation/Project_Documentation.md</a:t>
             </a:r>
             <a:endParaRPr lang="en-US" sz="1400" dirty="0"/>
           </a:p>
@@ -14161,7 +14161,7 @@
                 <a:ea typeface="Arial" pitchFamily="34" charset="-122"/>
                 <a:cs typeface="Arial" pitchFamily="34" charset="-120"/>
               </a:rPr>
-              <a:t>Full detail for every step lives in 02_SQL_Scripts/ and 04_PowerBI_Guide/ in the project folder.</a:t>
+              <a:t>Full detail for every step lives in 02_SQL_Scripts/ and 04_PowerBI/ in the project folder.</a:t>
             </a:r>
             <a:endParaRPr lang="en-US" sz="1150" dirty="0"/>
           </a:p>
